--- a/ppt資料/2分プレゼン_v1.pptx
+++ b/ppt資料/2分プレゼン_v1.pptx
@@ -3295,7 +3295,7 @@
                 <a:ea typeface="Meiryo UI"/>
                 <a:cs typeface="Meiryo UI"/>
               </a:rPr>
-              <a:t>家を買う年と、学童に入れない年が、6年ずれている</a:t>
+              <a:t>児童数が減っても、学童は足りなくなる</a:t>
             </a:r>
           </a:p>
         </p:txBody>
@@ -3336,20 +3336,801 @@
                 <a:ea typeface="Meiryo UI"/>
                 <a:cs typeface="Meiryo UI"/>
               </a:rPr>
-              <a:t>意思決定する時点と、痛みが出る時点</a:t>
+              <a:t>東京49自治体・2025年5月1日時点の実測と、受け皿を据え置いた場合の試算</a:t>
+            </a:r>
+          </a:p>
+        </p:txBody>
+      </p:sp>
+      <p:sp>
+        <p:nvSpPr>
+          <p:cNvPr id="4" name="Rectangle 3"/>
+          <p:cNvSpPr/>
+          <p:nvPr/>
+        </p:nvSpPr>
+        <p:spPr>
+          <a:xfrm>
+            <a:off x="566928" y="1664208"/>
+            <a:ext cx="3503066" cy="50292"/>
+          </a:xfrm>
+          <a:prstGeom prst="rect">
+            <a:avLst/>
+          </a:prstGeom>
+          <a:solidFill>
+            <a:srgbClr val="1C5CAB"/>
+          </a:solidFill>
+          <a:ln>
+            <a:noFill/>
+          </a:ln>
+          <a:effectLst/>
+        </p:spPr>
+        <p:style>
+          <a:lnRef idx="1">
+            <a:schemeClr val="accent1"/>
+          </a:lnRef>
+          <a:fillRef idx="3">
+            <a:schemeClr val="accent1"/>
+          </a:fillRef>
+          <a:effectRef idx="2">
+            <a:schemeClr val="accent1"/>
+          </a:effectRef>
+          <a:fontRef idx="minor">
+            <a:schemeClr val="lt1"/>
+          </a:fontRef>
+        </p:style>
+        <p:txBody>
+          <a:bodyPr rtlCol="0" anchor="ctr" wrap="square" lIns="128016" rIns="128016" tIns="73152" bIns="73152"/>
+          <a:lstStyle/>
+          <a:p>
+            <a:pPr algn="ctr"/>
+          </a:p>
+        </p:txBody>
+      </p:sp>
+      <p:sp>
+        <p:nvSpPr>
+          <p:cNvPr id="5" name="Rectangle 4"/>
+          <p:cNvSpPr/>
+          <p:nvPr/>
+        </p:nvSpPr>
+        <p:spPr>
+          <a:xfrm>
+            <a:off x="566928" y="1714500"/>
+            <a:ext cx="3503066" cy="1389888"/>
+          </a:xfrm>
+          <a:prstGeom prst="rect">
+            <a:avLst/>
+          </a:prstGeom>
+          <a:solidFill>
+            <a:srgbClr val="ECF2FB"/>
+          </a:solidFill>
+          <a:ln>
+            <a:noFill/>
+          </a:ln>
+          <a:effectLst/>
+        </p:spPr>
+        <p:style>
+          <a:lnRef idx="1">
+            <a:schemeClr val="accent1"/>
+          </a:lnRef>
+          <a:fillRef idx="3">
+            <a:schemeClr val="accent1"/>
+          </a:fillRef>
+          <a:effectRef idx="2">
+            <a:schemeClr val="accent1"/>
+          </a:effectRef>
+          <a:fontRef idx="minor">
+            <a:schemeClr val="lt1"/>
+          </a:fontRef>
+        </p:style>
+        <p:txBody>
+          <a:bodyPr rtlCol="0" anchor="ctr" wrap="square" lIns="128016" rIns="128016" tIns="73152" bIns="73152"/>
+          <a:lstStyle/>
+          <a:p>
+            <a:pPr algn="ctr"/>
+          </a:p>
+        </p:txBody>
+      </p:sp>
+      <p:sp>
+        <p:nvSpPr>
+          <p:cNvPr id="6" name="TextBox 5"/>
+          <p:cNvSpPr txBox="1"/>
+          <p:nvPr/>
+        </p:nvSpPr>
+        <p:spPr>
+          <a:xfrm>
+            <a:off x="768096" y="1828800"/>
+            <a:ext cx="3100730" cy="548640"/>
+          </a:xfrm>
+          <a:prstGeom prst="rect">
+            <a:avLst/>
+          </a:prstGeom>
+          <a:noFill/>
+        </p:spPr>
+        <p:txBody>
+          <a:bodyPr wrap="square" lIns="0" rIns="0" tIns="0" bIns="0" anchor="t">
+            <a:spAutoFit/>
+          </a:bodyPr>
+          <a:lstStyle/>
+          <a:p>
+            <a:pPr algn="l">
+              <a:spcAft>
+                <a:spcPts val="0"/>
+              </a:spcAft>
+            </a:pPr>
+            <a:r>
+              <a:rPr sz="3200" b="1">
+                <a:solidFill>
+                  <a:srgbClr val="1C5CAB"/>
+                </a:solidFill>
+                <a:latin typeface="Meiryo UI"/>
+                <a:ea typeface="Meiryo UI"/>
+                <a:cs typeface="Meiryo UI"/>
+              </a:rPr>
+              <a:t>146,393人</a:t>
+            </a:r>
+          </a:p>
+        </p:txBody>
+      </p:sp>
+      <p:sp>
+        <p:nvSpPr>
+          <p:cNvPr id="7" name="TextBox 6"/>
+          <p:cNvSpPr txBox="1"/>
+          <p:nvPr/>
+        </p:nvSpPr>
+        <p:spPr>
+          <a:xfrm>
+            <a:off x="768096" y="2432304"/>
+            <a:ext cx="3100730" cy="457200"/>
+          </a:xfrm>
+          <a:prstGeom prst="rect">
+            <a:avLst/>
+          </a:prstGeom>
+          <a:noFill/>
+        </p:spPr>
+        <p:txBody>
+          <a:bodyPr wrap="square" lIns="0" rIns="0" tIns="0" bIns="0" anchor="t">
+            <a:spAutoFit/>
+          </a:bodyPr>
+          <a:lstStyle/>
+          <a:p>
+            <a:pPr algn="l">
+              <a:lnSpc>
+                <a:spcPct val="130000"/>
+              </a:lnSpc>
+              <a:spcAft>
+                <a:spcPts val="0"/>
+              </a:spcAft>
+            </a:pPr>
+            <a:r>
+              <a:rPr sz="1150" b="0">
+                <a:solidFill>
+                  <a:srgbClr val="1A1A1A"/>
+                </a:solidFill>
+                <a:latin typeface="Meiryo UI"/>
+                <a:ea typeface="Meiryo UI"/>
+                <a:cs typeface="Meiryo UI"/>
+              </a:rPr>
+              <a:t>学童に登録している児童。</a:t>
+            </a:r>
+          </a:p>
+          <a:p>
+            <a:pPr>
+              <a:lnSpc>
+                <a:spcPct val="130000"/>
+              </a:lnSpc>
+              <a:spcAft>
+                <a:spcPts val="0"/>
+              </a:spcAft>
+            </a:pPr>
+            <a:r>
+              <a:rPr sz="1150" b="0">
+                <a:solidFill>
+                  <a:srgbClr val="1A1A1A"/>
+                </a:solidFill>
+                <a:latin typeface="Meiryo UI"/>
+                <a:ea typeface="Meiryo UI"/>
+                <a:cs typeface="Meiryo UI"/>
+              </a:rPr>
+              <a:t>公立小学校児童 589,912人の 4人に1人</a:t>
+            </a:r>
+          </a:p>
+        </p:txBody>
+      </p:sp>
+      <p:sp>
+        <p:nvSpPr>
+          <p:cNvPr id="8" name="TextBox 7"/>
+          <p:cNvSpPr txBox="1"/>
+          <p:nvPr/>
+        </p:nvSpPr>
+        <p:spPr>
+          <a:xfrm>
+            <a:off x="768096" y="2871216"/>
+            <a:ext cx="3100730" cy="219456"/>
+          </a:xfrm>
+          <a:prstGeom prst="rect">
+            <a:avLst/>
+          </a:prstGeom>
+          <a:noFill/>
+        </p:spPr>
+        <p:txBody>
+          <a:bodyPr wrap="square" lIns="0" rIns="0" tIns="0" bIns="0" anchor="t">
+            <a:spAutoFit/>
+          </a:bodyPr>
+          <a:lstStyle/>
+          <a:p>
+            <a:pPr algn="l">
+              <a:spcAft>
+                <a:spcPts val="0"/>
+              </a:spcAft>
+            </a:pPr>
+            <a:r>
+              <a:rPr sz="900" b="0">
+                <a:solidFill>
+                  <a:srgbClr val="9A9A9A"/>
+                </a:solidFill>
+                <a:latin typeface="Meiryo UI"/>
+                <a:ea typeface="Meiryo UI"/>
+                <a:cs typeface="Meiryo UI"/>
+              </a:rPr>
+              <a:t>2025年5月1日・49自治体</a:t>
+            </a:r>
+          </a:p>
+        </p:txBody>
+      </p:sp>
+      <p:sp>
+        <p:nvSpPr>
+          <p:cNvPr id="9" name="Rectangle 8"/>
+          <p:cNvSpPr/>
+          <p:nvPr/>
+        </p:nvSpPr>
+        <p:spPr>
+          <a:xfrm>
+            <a:off x="4344314" y="1664208"/>
+            <a:ext cx="3503066" cy="50292"/>
+          </a:xfrm>
+          <a:prstGeom prst="rect">
+            <a:avLst/>
+          </a:prstGeom>
+          <a:solidFill>
+            <a:srgbClr val="1C5CAB"/>
+          </a:solidFill>
+          <a:ln>
+            <a:noFill/>
+          </a:ln>
+          <a:effectLst/>
+        </p:spPr>
+        <p:style>
+          <a:lnRef idx="1">
+            <a:schemeClr val="accent1"/>
+          </a:lnRef>
+          <a:fillRef idx="3">
+            <a:schemeClr val="accent1"/>
+          </a:fillRef>
+          <a:effectRef idx="2">
+            <a:schemeClr val="accent1"/>
+          </a:effectRef>
+          <a:fontRef idx="minor">
+            <a:schemeClr val="lt1"/>
+          </a:fontRef>
+        </p:style>
+        <p:txBody>
+          <a:bodyPr rtlCol="0" anchor="ctr" wrap="square" lIns="128016" rIns="128016" tIns="73152" bIns="73152"/>
+          <a:lstStyle/>
+          <a:p>
+            <a:pPr algn="ctr"/>
+          </a:p>
+        </p:txBody>
+      </p:sp>
+      <p:sp>
+        <p:nvSpPr>
+          <p:cNvPr id="10" name="Rectangle 9"/>
+          <p:cNvSpPr/>
+          <p:nvPr/>
+        </p:nvSpPr>
+        <p:spPr>
+          <a:xfrm>
+            <a:off x="4344314" y="1714500"/>
+            <a:ext cx="3503066" cy="1389888"/>
+          </a:xfrm>
+          <a:prstGeom prst="rect">
+            <a:avLst/>
+          </a:prstGeom>
+          <a:solidFill>
+            <a:srgbClr val="ECF2FB"/>
+          </a:solidFill>
+          <a:ln>
+            <a:noFill/>
+          </a:ln>
+          <a:effectLst/>
+        </p:spPr>
+        <p:style>
+          <a:lnRef idx="1">
+            <a:schemeClr val="accent1"/>
+          </a:lnRef>
+          <a:fillRef idx="3">
+            <a:schemeClr val="accent1"/>
+          </a:fillRef>
+          <a:effectRef idx="2">
+            <a:schemeClr val="accent1"/>
+          </a:effectRef>
+          <a:fontRef idx="minor">
+            <a:schemeClr val="lt1"/>
+          </a:fontRef>
+        </p:style>
+        <p:txBody>
+          <a:bodyPr rtlCol="0" anchor="ctr" wrap="square" lIns="128016" rIns="128016" tIns="73152" bIns="73152"/>
+          <a:lstStyle/>
+          <a:p>
+            <a:pPr algn="ctr"/>
+          </a:p>
+        </p:txBody>
+      </p:sp>
+      <p:sp>
+        <p:nvSpPr>
+          <p:cNvPr id="11" name="TextBox 10"/>
+          <p:cNvSpPr txBox="1"/>
+          <p:nvPr/>
+        </p:nvSpPr>
+        <p:spPr>
+          <a:xfrm>
+            <a:off x="4545482" y="1828800"/>
+            <a:ext cx="3100730" cy="548640"/>
+          </a:xfrm>
+          <a:prstGeom prst="rect">
+            <a:avLst/>
+          </a:prstGeom>
+          <a:noFill/>
+        </p:spPr>
+        <p:txBody>
+          <a:bodyPr wrap="square" lIns="0" rIns="0" tIns="0" bIns="0" anchor="t">
+            <a:spAutoFit/>
+          </a:bodyPr>
+          <a:lstStyle/>
+          <a:p>
+            <a:pPr algn="l">
+              <a:spcAft>
+                <a:spcPts val="0"/>
+              </a:spcAft>
+            </a:pPr>
+            <a:r>
+              <a:rPr sz="3200" b="1">
+                <a:solidFill>
+                  <a:srgbClr val="1C5CAB"/>
+                </a:solidFill>
+                <a:latin typeface="Meiryo UI"/>
+                <a:ea typeface="Meiryo UI"/>
+                <a:cs typeface="Meiryo UI"/>
+              </a:rPr>
+              <a:t>+5.9%</a:t>
+            </a:r>
+          </a:p>
+        </p:txBody>
+      </p:sp>
+      <p:sp>
+        <p:nvSpPr>
+          <p:cNvPr id="12" name="TextBox 11"/>
+          <p:cNvSpPr txBox="1"/>
+          <p:nvPr/>
+        </p:nvSpPr>
+        <p:spPr>
+          <a:xfrm>
+            <a:off x="4545482" y="2432304"/>
+            <a:ext cx="3100730" cy="457200"/>
+          </a:xfrm>
+          <a:prstGeom prst="rect">
+            <a:avLst/>
+          </a:prstGeom>
+          <a:noFill/>
+        </p:spPr>
+        <p:txBody>
+          <a:bodyPr wrap="square" lIns="0" rIns="0" tIns="0" bIns="0" anchor="t">
+            <a:spAutoFit/>
+          </a:bodyPr>
+          <a:lstStyle/>
+          <a:p>
+            <a:pPr algn="l">
+              <a:lnSpc>
+                <a:spcPct val="130000"/>
+              </a:lnSpc>
+              <a:spcAft>
+                <a:spcPts val="0"/>
+              </a:spcAft>
+            </a:pPr>
+            <a:r>
+              <a:rPr sz="1150" b="0">
+                <a:solidFill>
+                  <a:srgbClr val="1A1A1A"/>
+                </a:solidFill>
+                <a:latin typeface="Meiryo UI"/>
+                <a:ea typeface="Meiryo UI"/>
+                <a:cs typeface="Meiryo UI"/>
+              </a:rPr>
+              <a:t>2年で増えた学童の需要（登録＋待機）。</a:t>
+            </a:r>
+          </a:p>
+          <a:p>
+            <a:pPr>
+              <a:lnSpc>
+                <a:spcPct val="130000"/>
+              </a:lnSpc>
+              <a:spcAft>
+                <a:spcPts val="0"/>
+              </a:spcAft>
+            </a:pPr>
+            <a:r>
+              <a:rPr sz="1150" b="0">
+                <a:solidFill>
+                  <a:srgbClr val="1A1A1A"/>
+                </a:solidFill>
+                <a:latin typeface="Meiryo UI"/>
+                <a:ea typeface="Meiryo UI"/>
+                <a:cs typeface="Meiryo UI"/>
+              </a:rPr>
+              <a:t>同じ2年で児童数は −0.8%</a:t>
+            </a:r>
+          </a:p>
+        </p:txBody>
+      </p:sp>
+      <p:sp>
+        <p:nvSpPr>
+          <p:cNvPr id="13" name="TextBox 12"/>
+          <p:cNvSpPr txBox="1"/>
+          <p:nvPr/>
+        </p:nvSpPr>
+        <p:spPr>
+          <a:xfrm>
+            <a:off x="4545482" y="2871216"/>
+            <a:ext cx="3100730" cy="219456"/>
+          </a:xfrm>
+          <a:prstGeom prst="rect">
+            <a:avLst/>
+          </a:prstGeom>
+          <a:noFill/>
+        </p:spPr>
+        <p:txBody>
+          <a:bodyPr wrap="square" lIns="0" rIns="0" tIns="0" bIns="0" anchor="t">
+            <a:spAutoFit/>
+          </a:bodyPr>
+          <a:lstStyle/>
+          <a:p>
+            <a:pPr algn="l">
+              <a:spcAft>
+                <a:spcPts val="0"/>
+              </a:spcAft>
+            </a:pPr>
+            <a:r>
+              <a:rPr sz="900" b="0">
+                <a:solidFill>
+                  <a:srgbClr val="9A9A9A"/>
+                </a:solidFill>
+                <a:latin typeface="Meiryo UI"/>
+                <a:ea typeface="Meiryo UI"/>
+                <a:cs typeface="Meiryo UI"/>
+              </a:rPr>
+              <a:t>2023年5月→2025年5月・48自治体</a:t>
+            </a:r>
+          </a:p>
+        </p:txBody>
+      </p:sp>
+      <p:sp>
+        <p:nvSpPr>
+          <p:cNvPr id="14" name="Rectangle 13"/>
+          <p:cNvSpPr/>
+          <p:nvPr/>
+        </p:nvSpPr>
+        <p:spPr>
+          <a:xfrm>
+            <a:off x="8121700" y="1664208"/>
+            <a:ext cx="3503066" cy="50292"/>
+          </a:xfrm>
+          <a:prstGeom prst="rect">
+            <a:avLst/>
+          </a:prstGeom>
+          <a:solidFill>
+            <a:srgbClr val="1C5CAB"/>
+          </a:solidFill>
+          <a:ln>
+            <a:noFill/>
+          </a:ln>
+          <a:effectLst/>
+        </p:spPr>
+        <p:style>
+          <a:lnRef idx="1">
+            <a:schemeClr val="accent1"/>
+          </a:lnRef>
+          <a:fillRef idx="3">
+            <a:schemeClr val="accent1"/>
+          </a:fillRef>
+          <a:effectRef idx="2">
+            <a:schemeClr val="accent1"/>
+          </a:effectRef>
+          <a:fontRef idx="minor">
+            <a:schemeClr val="lt1"/>
+          </a:fontRef>
+        </p:style>
+        <p:txBody>
+          <a:bodyPr rtlCol="0" anchor="ctr" wrap="square" lIns="128016" rIns="128016" tIns="73152" bIns="73152"/>
+          <a:lstStyle/>
+          <a:p>
+            <a:pPr algn="ctr"/>
+          </a:p>
+        </p:txBody>
+      </p:sp>
+      <p:sp>
+        <p:nvSpPr>
+          <p:cNvPr id="15" name="Rectangle 14"/>
+          <p:cNvSpPr/>
+          <p:nvPr/>
+        </p:nvSpPr>
+        <p:spPr>
+          <a:xfrm>
+            <a:off x="8121700" y="1714500"/>
+            <a:ext cx="3503066" cy="1389888"/>
+          </a:xfrm>
+          <a:prstGeom prst="rect">
+            <a:avLst/>
+          </a:prstGeom>
+          <a:solidFill>
+            <a:srgbClr val="ECF2FB"/>
+          </a:solidFill>
+          <a:ln>
+            <a:noFill/>
+          </a:ln>
+          <a:effectLst/>
+        </p:spPr>
+        <p:style>
+          <a:lnRef idx="1">
+            <a:schemeClr val="accent1"/>
+          </a:lnRef>
+          <a:fillRef idx="3">
+            <a:schemeClr val="accent1"/>
+          </a:fillRef>
+          <a:effectRef idx="2">
+            <a:schemeClr val="accent1"/>
+          </a:effectRef>
+          <a:fontRef idx="minor">
+            <a:schemeClr val="lt1"/>
+          </a:fontRef>
+        </p:style>
+        <p:txBody>
+          <a:bodyPr rtlCol="0" anchor="ctr" wrap="square" lIns="128016" rIns="128016" tIns="73152" bIns="73152"/>
+          <a:lstStyle/>
+          <a:p>
+            <a:pPr algn="ctr"/>
+          </a:p>
+        </p:txBody>
+      </p:sp>
+      <p:sp>
+        <p:nvSpPr>
+          <p:cNvPr id="16" name="TextBox 15"/>
+          <p:cNvSpPr txBox="1"/>
+          <p:nvPr/>
+        </p:nvSpPr>
+        <p:spPr>
+          <a:xfrm>
+            <a:off x="8322868" y="1828800"/>
+            <a:ext cx="3100730" cy="548640"/>
+          </a:xfrm>
+          <a:prstGeom prst="rect">
+            <a:avLst/>
+          </a:prstGeom>
+          <a:noFill/>
+        </p:spPr>
+        <p:txBody>
+          <a:bodyPr wrap="square" lIns="0" rIns="0" tIns="0" bIns="0" anchor="t">
+            <a:spAutoFit/>
+          </a:bodyPr>
+          <a:lstStyle/>
+          <a:p>
+            <a:pPr algn="l">
+              <a:spcAft>
+                <a:spcPts val="0"/>
+              </a:spcAft>
+            </a:pPr>
+            <a:r>
+              <a:rPr sz="3200" b="1">
+                <a:solidFill>
+                  <a:srgbClr val="1C5CAB"/>
+                </a:solidFill>
+                <a:latin typeface="Meiryo UI"/>
+                <a:ea typeface="Meiryo UI"/>
+                <a:cs typeface="Meiryo UI"/>
+              </a:rPr>
+              <a:t>19,573人分</a:t>
+            </a:r>
+          </a:p>
+        </p:txBody>
+      </p:sp>
+      <p:sp>
+        <p:nvSpPr>
+          <p:cNvPr id="17" name="TextBox 16"/>
+          <p:cNvSpPr txBox="1"/>
+          <p:nvPr/>
+        </p:nvSpPr>
+        <p:spPr>
+          <a:xfrm>
+            <a:off x="8322868" y="2432304"/>
+            <a:ext cx="3100730" cy="457200"/>
+          </a:xfrm>
+          <a:prstGeom prst="rect">
+            <a:avLst/>
+          </a:prstGeom>
+          <a:noFill/>
+        </p:spPr>
+        <p:txBody>
+          <a:bodyPr wrap="square" lIns="0" rIns="0" tIns="0" bIns="0" anchor="t">
+            <a:spAutoFit/>
+          </a:bodyPr>
+          <a:lstStyle/>
+          <a:p>
+            <a:pPr algn="l">
+              <a:lnSpc>
+                <a:spcPct val="130000"/>
+              </a:lnSpc>
+              <a:spcAft>
+                <a:spcPts val="0"/>
+              </a:spcAft>
+            </a:pPr>
+            <a:r>
+              <a:rPr sz="1150" b="0">
+                <a:solidFill>
+                  <a:srgbClr val="1A1A1A"/>
+                </a:solidFill>
+                <a:latin typeface="Meiryo UI"/>
+                <a:ea typeface="Meiryo UI"/>
+                <a:cs typeface="Meiryo UI"/>
+              </a:rPr>
+              <a:t>受け皿が今のままなら、</a:t>
+            </a:r>
+          </a:p>
+          <a:p>
+            <a:pPr>
+              <a:lnSpc>
+                <a:spcPct val="130000"/>
+              </a:lnSpc>
+              <a:spcAft>
+                <a:spcPts val="0"/>
+              </a:spcAft>
+            </a:pPr>
+            <a:r>
+              <a:rPr sz="1150" b="0">
+                <a:solidFill>
+                  <a:srgbClr val="1A1A1A"/>
+                </a:solidFill>
+                <a:latin typeface="Meiryo UI"/>
+                <a:ea typeface="Meiryo UI"/>
+                <a:cs typeface="Meiryo UI"/>
+              </a:rPr>
+              <a:t>2038年度に足りない</a:t>
+            </a:r>
+          </a:p>
+        </p:txBody>
+      </p:sp>
+      <p:sp>
+        <p:nvSpPr>
+          <p:cNvPr id="18" name="TextBox 17"/>
+          <p:cNvSpPr txBox="1"/>
+          <p:nvPr/>
+        </p:nvSpPr>
+        <p:spPr>
+          <a:xfrm>
+            <a:off x="8322868" y="2871216"/>
+            <a:ext cx="3100730" cy="219456"/>
+          </a:xfrm>
+          <a:prstGeom prst="rect">
+            <a:avLst/>
+          </a:prstGeom>
+          <a:noFill/>
+        </p:spPr>
+        <p:txBody>
+          <a:bodyPr wrap="square" lIns="0" rIns="0" tIns="0" bIns="0" anchor="t">
+            <a:spAutoFit/>
+          </a:bodyPr>
+          <a:lstStyle/>
+          <a:p>
+            <a:pPr algn="l">
+              <a:spcAft>
+                <a:spcPts val="0"/>
+              </a:spcAft>
+            </a:pPr>
+            <a:r>
+              <a:rPr sz="900" b="0">
+                <a:solidFill>
+                  <a:srgbClr val="9A9A9A"/>
+                </a:solidFill>
+                <a:latin typeface="Meiryo UI"/>
+                <a:ea typeface="Meiryo UI"/>
+                <a:cs typeface="Meiryo UI"/>
+              </a:rPr>
+              <a:t>本サービスの試算・46/49自治体で不足</a:t>
             </a:r>
           </a:p>
         </p:txBody>
       </p:sp>
       <p:cxnSp>
         <p:nvCxnSpPr>
-          <p:cNvPr id="4" name="Connector 3"/>
+          <p:cNvPr id="19" name="Connector 18"/>
           <p:cNvCxnSpPr/>
           <p:nvPr/>
         </p:nvCxnSpPr>
         <p:spPr>
           <a:xfrm>
-            <a:off x="1417320" y="3520440"/>
+            <a:off x="566928" y="3310128"/>
+            <a:ext cx="11057839" cy="0"/>
+          </a:xfrm>
+          <a:prstGeom prst="line">
+            <a:avLst/>
+          </a:prstGeom>
+          <a:ln w="12700">
+            <a:solidFill>
+              <a:srgbClr val="D5D5D1"/>
+            </a:solidFill>
+          </a:ln>
+        </p:spPr>
+        <p:style>
+          <a:lnRef idx="2">
+            <a:schemeClr val="accent1"/>
+          </a:lnRef>
+          <a:fillRef idx="0">
+            <a:schemeClr val="accent1"/>
+          </a:fillRef>
+          <a:effectRef idx="1">
+            <a:schemeClr val="accent1"/>
+          </a:effectRef>
+          <a:fontRef idx="minor">
+            <a:schemeClr val="tx1"/>
+          </a:fontRef>
+        </p:style>
+      </p:cxnSp>
+      <p:sp>
+        <p:nvSpPr>
+          <p:cNvPr id="20" name="TextBox 19"/>
+          <p:cNvSpPr txBox="1"/>
+          <p:nvPr/>
+        </p:nvSpPr>
+        <p:spPr>
+          <a:xfrm>
+            <a:off x="566928" y="3511296"/>
+            <a:ext cx="11057839" cy="292608"/>
+          </a:xfrm>
+          <a:prstGeom prst="rect">
+            <a:avLst/>
+          </a:prstGeom>
+          <a:noFill/>
+        </p:spPr>
+        <p:txBody>
+          <a:bodyPr wrap="square" lIns="0" rIns="0" tIns="0" bIns="0" anchor="t">
+            <a:spAutoFit/>
+          </a:bodyPr>
+          <a:lstStyle/>
+          <a:p>
+            <a:pPr algn="l">
+              <a:spcAft>
+                <a:spcPts val="0"/>
+              </a:spcAft>
+            </a:pPr>
+            <a:r>
+              <a:rPr sz="1500" b="1">
+                <a:solidFill>
+                  <a:srgbClr val="5A5A5A"/>
+                </a:solidFill>
+                <a:latin typeface="Meiryo UI"/>
+                <a:ea typeface="Meiryo UI"/>
+                <a:cs typeface="Meiryo UI"/>
+              </a:rPr>
+              <a:t>そして、足りないと気づくのは 家を買った6年後</a:t>
+            </a:r>
+          </a:p>
+        </p:txBody>
+      </p:sp>
+      <p:cxnSp>
+        <p:nvCxnSpPr>
+          <p:cNvPr id="21" name="Connector 20"/>
+          <p:cNvCxnSpPr/>
+          <p:nvPr/>
+        </p:nvCxnSpPr>
+        <p:spPr>
+          <a:xfrm>
+            <a:off x="1417320" y="4526280"/>
             <a:ext cx="9326880" cy="0"/>
           </a:xfrm>
           <a:prstGeom prst="line">
@@ -3378,14 +4159,14 @@
       </p:cxnSp>
       <p:sp>
         <p:nvSpPr>
-          <p:cNvPr id="5" name="Oval 4"/>
+          <p:cNvPr id="22" name="Oval 21"/>
           <p:cNvSpPr/>
           <p:nvPr/>
         </p:nvSpPr>
         <p:spPr>
           <a:xfrm>
-            <a:off x="2103120" y="3383280"/>
-            <a:ext cx="274320" cy="274320"/>
+            <a:off x="2112264" y="4398264"/>
+            <a:ext cx="256032" cy="256032"/>
           </a:xfrm>
           <a:prstGeom prst="ellipse">
             <a:avLst/>
@@ -3422,14 +4203,14 @@
       </p:sp>
       <p:sp>
         <p:nvSpPr>
-          <p:cNvPr id="6" name="TextBox 5"/>
+          <p:cNvPr id="23" name="TextBox 22"/>
           <p:cNvSpPr txBox="1"/>
           <p:nvPr/>
         </p:nvSpPr>
         <p:spPr>
           <a:xfrm>
-            <a:off x="685800" y="2560320"/>
-            <a:ext cx="3108960" cy="457200"/>
+            <a:off x="502920" y="3739896"/>
+            <a:ext cx="3474720" cy="384048"/>
           </a:xfrm>
           <a:prstGeom prst="rect">
             <a:avLst/>
@@ -3448,7 +4229,7 @@
               </a:spcAft>
             </a:pPr>
             <a:r>
-              <a:rPr sz="2000" b="1">
+              <a:rPr sz="1800" b="1">
                 <a:solidFill>
                   <a:srgbClr val="5A5A5A"/>
                 </a:solidFill>
@@ -3463,14 +4244,14 @@
       </p:sp>
       <p:sp>
         <p:nvSpPr>
-          <p:cNvPr id="7" name="TextBox 6"/>
+          <p:cNvPr id="24" name="TextBox 23"/>
           <p:cNvSpPr txBox="1"/>
           <p:nvPr/>
         </p:nvSpPr>
         <p:spPr>
           <a:xfrm>
-            <a:off x="685800" y="3831336"/>
-            <a:ext cx="3108960" cy="822960"/>
+            <a:off x="502920" y="4782312"/>
+            <a:ext cx="3474720" cy="365760"/>
           </a:xfrm>
           <a:prstGeom prst="rect">
             <a:avLst/>
@@ -3484,15 +4265,12 @@
           <a:lstStyle/>
           <a:p>
             <a:pPr algn="ctr">
-              <a:lnSpc>
-                <a:spcPct val="135000"/>
-              </a:lnSpc>
               <a:spcAft>
                 <a:spcPts val="0"/>
               </a:spcAft>
             </a:pPr>
             <a:r>
-              <a:rPr sz="1350" b="0">
+              <a:rPr sz="1300" b="0">
                 <a:solidFill>
                   <a:srgbClr val="5A5A5A"/>
                 </a:solidFill>
@@ -3500,42 +4278,21 @@
                 <a:ea typeface="Meiryo UI"/>
                 <a:cs typeface="Meiryo UI"/>
               </a:rPr>
-              <a:t>第一子が0歳。</a:t>
-            </a:r>
-          </a:p>
-          <a:p>
-            <a:pPr algn="ctr">
-              <a:lnSpc>
-                <a:spcPct val="135000"/>
-              </a:lnSpc>
-              <a:spcAft>
-                <a:spcPts val="0"/>
-              </a:spcAft>
-            </a:pPr>
-            <a:r>
-              <a:rPr sz="1350" b="0">
-                <a:solidFill>
-                  <a:srgbClr val="5A5A5A"/>
-                </a:solidFill>
-                <a:latin typeface="Meiryo UI"/>
-                <a:ea typeface="Meiryo UI"/>
-                <a:cs typeface="Meiryo UI"/>
-              </a:rPr>
-              <a:t>住宅ローンを組む</a:t>
-            </a:r>
-          </a:p>
-        </p:txBody>
-      </p:sp>
-      <p:sp>
-        <p:nvSpPr>
-          <p:cNvPr id="8" name="Oval 7"/>
+              <a:t>第一子が0歳。住宅ローンを組む</a:t>
+            </a:r>
+          </a:p>
+        </p:txBody>
+      </p:sp>
+      <p:sp>
+        <p:nvSpPr>
+          <p:cNvPr id="25" name="Oval 24"/>
           <p:cNvSpPr/>
           <p:nvPr/>
         </p:nvSpPr>
         <p:spPr>
           <a:xfrm>
-            <a:off x="9784080" y="3383280"/>
-            <a:ext cx="274320" cy="274320"/>
+            <a:off x="9793224" y="4398264"/>
+            <a:ext cx="256032" cy="256032"/>
           </a:xfrm>
           <a:prstGeom prst="ellipse">
             <a:avLst/>
@@ -3572,14 +4329,14 @@
       </p:sp>
       <p:sp>
         <p:nvSpPr>
-          <p:cNvPr id="9" name="TextBox 8"/>
+          <p:cNvPr id="26" name="TextBox 25"/>
           <p:cNvSpPr txBox="1"/>
           <p:nvPr/>
         </p:nvSpPr>
         <p:spPr>
           <a:xfrm>
-            <a:off x="8366760" y="2560320"/>
-            <a:ext cx="3108960" cy="457200"/>
+            <a:off x="8183879" y="3739896"/>
+            <a:ext cx="3474720" cy="384048"/>
           </a:xfrm>
           <a:prstGeom prst="rect">
             <a:avLst/>
@@ -3598,7 +4355,7 @@
               </a:spcAft>
             </a:pPr>
             <a:r>
-              <a:rPr sz="2000" b="1">
+              <a:rPr sz="1800" b="1">
                 <a:solidFill>
                   <a:srgbClr val="0D366B"/>
                 </a:solidFill>
@@ -3613,14 +4370,14 @@
       </p:sp>
       <p:sp>
         <p:nvSpPr>
-          <p:cNvPr id="10" name="TextBox 9"/>
+          <p:cNvPr id="27" name="TextBox 26"/>
           <p:cNvSpPr txBox="1"/>
           <p:nvPr/>
         </p:nvSpPr>
         <p:spPr>
           <a:xfrm>
-            <a:off x="8366760" y="3831336"/>
-            <a:ext cx="3108960" cy="822960"/>
+            <a:off x="8183879" y="4782312"/>
+            <a:ext cx="3474720" cy="365760"/>
           </a:xfrm>
           <a:prstGeom prst="rect">
             <a:avLst/>
@@ -3634,15 +4391,12 @@
           <a:lstStyle/>
           <a:p>
             <a:pPr algn="ctr">
-              <a:lnSpc>
-                <a:spcPct val="135000"/>
-              </a:lnSpc>
               <a:spcAft>
                 <a:spcPts val="0"/>
               </a:spcAft>
             </a:pPr>
             <a:r>
-              <a:rPr sz="1350" b="1">
+              <a:rPr sz="1300" b="1">
                 <a:solidFill>
                   <a:srgbClr val="1A1A1A"/>
                 </a:solidFill>
@@ -3650,41 +4404,20 @@
                 <a:ea typeface="Meiryo UI"/>
                 <a:cs typeface="Meiryo UI"/>
               </a:rPr>
-              <a:t>子が小1。</a:t>
-            </a:r>
-          </a:p>
-          <a:p>
-            <a:pPr algn="ctr">
-              <a:lnSpc>
-                <a:spcPct val="135000"/>
-              </a:lnSpc>
-              <a:spcAft>
-                <a:spcPts val="0"/>
-              </a:spcAft>
-            </a:pPr>
-            <a:r>
-              <a:rPr sz="1350" b="1">
-                <a:solidFill>
-                  <a:srgbClr val="1A1A1A"/>
-                </a:solidFill>
-                <a:latin typeface="Meiryo UI"/>
-                <a:ea typeface="Meiryo UI"/>
-                <a:cs typeface="Meiryo UI"/>
-              </a:rPr>
-              <a:t>学童に入れない</a:t>
+              <a:t>子が小1。学童に入れない</a:t>
             </a:r>
           </a:p>
         </p:txBody>
       </p:sp>
       <p:cxnSp>
         <p:nvCxnSpPr>
-          <p:cNvPr id="11" name="Connector 10"/>
+          <p:cNvPr id="28" name="Connector 27"/>
           <p:cNvCxnSpPr/>
           <p:nvPr/>
         </p:nvCxnSpPr>
         <p:spPr>
           <a:xfrm>
-            <a:off x="3977639" y="3520440"/>
+            <a:off x="3977639" y="4526280"/>
             <a:ext cx="5696713" cy="0"/>
           </a:xfrm>
           <a:prstGeom prst="line">
@@ -3714,14 +4447,14 @@
       </p:cxnSp>
       <p:sp>
         <p:nvSpPr>
-          <p:cNvPr id="12" name="Rectangle 11"/>
+          <p:cNvPr id="29" name="Rectangle 28"/>
           <p:cNvSpPr/>
           <p:nvPr/>
         </p:nvSpPr>
         <p:spPr>
           <a:xfrm>
-            <a:off x="5577840" y="3273552"/>
-            <a:ext cx="1051560" cy="493776"/>
+            <a:off x="5577840" y="4297680"/>
+            <a:ext cx="1051560" cy="457200"/>
           </a:xfrm>
           <a:prstGeom prst="rect">
             <a:avLst/>
@@ -3758,7 +4491,7 @@
               </a:spcAft>
             </a:pPr>
             <a:r>
-              <a:rPr sz="2200" b="1">
+              <a:rPr sz="2100" b="1">
                 <a:solidFill>
                   <a:srgbClr val="1C5CAB"/>
                 </a:solidFill>
@@ -3773,48 +4506,7 @@
       </p:sp>
       <p:sp>
         <p:nvSpPr>
-          <p:cNvPr id="13" name="TextBox 12"/>
-          <p:cNvSpPr txBox="1"/>
-          <p:nvPr/>
-        </p:nvSpPr>
-        <p:spPr>
-          <a:xfrm>
-            <a:off x="566928" y="4846320"/>
-            <a:ext cx="11057839" cy="457200"/>
-          </a:xfrm>
-          <a:prstGeom prst="rect">
-            <a:avLst/>
-          </a:prstGeom>
-          <a:noFill/>
-        </p:spPr>
-        <p:txBody>
-          <a:bodyPr wrap="square" lIns="0" rIns="0" tIns="0" bIns="0" anchor="t">
-            <a:spAutoFit/>
-          </a:bodyPr>
-          <a:lstStyle/>
-          <a:p>
-            <a:pPr algn="ctr">
-              <a:spcAft>
-                <a:spcPts val="0"/>
-              </a:spcAft>
-            </a:pPr>
-            <a:r>
-              <a:rPr sz="1500" b="0">
-                <a:solidFill>
-                  <a:srgbClr val="5A5A5A"/>
-                </a:solidFill>
-                <a:latin typeface="Meiryo UI"/>
-                <a:ea typeface="Meiryo UI"/>
-                <a:cs typeface="Meiryo UI"/>
-              </a:rPr>
-              <a:t>この6年のあいだに、取り返しのつかない選択が終わっている</a:t>
-            </a:r>
-          </a:p>
-        </p:txBody>
-      </p:sp>
-      <p:sp>
-        <p:nvSpPr>
-          <p:cNvPr id="14" name="Rectangle 13"/>
+          <p:cNvPr id="30" name="Rectangle 29"/>
           <p:cNvSpPr/>
           <p:nvPr/>
         </p:nvSpPr>
@@ -3873,7 +4565,7 @@
       </p:sp>
       <p:sp>
         <p:nvSpPr>
-          <p:cNvPr id="15" name="TextBox 14"/>
+          <p:cNvPr id="31" name="TextBox 30"/>
           <p:cNvSpPr txBox="1"/>
           <p:nvPr/>
         </p:nvSpPr>
@@ -3910,14 +4602,14 @@
                 <a:ea typeface="Meiryo UI"/>
                 <a:cs typeface="Meiryo UI"/>
               </a:rPr>
-              <a:t>出典：東京都福祉局「東京の学童クラブ事業実施状況」ほか（東京都オープンデータカタログ・CC BY 4.0）</a:t>
-            </a:r>
-          </a:p>
-        </p:txBody>
-      </p:sp>
-      <p:sp>
-        <p:nvSpPr>
-          <p:cNvPr id="16" name="TextBox 15"/>
+              <a:t>出典：東京都福祉局「東京の学童クラブ事業実施状況」／東京都教育庁「教育人口等推計」（東京都オープンデータカタログ・CC BY 4.0）。需要の伸びは計上方法が変わった江戸川区を除く48自治体で実測</a:t>
+            </a:r>
+          </a:p>
+        </p:txBody>
+      </p:sp>
+      <p:sp>
+        <p:nvSpPr>
+          <p:cNvPr id="32" name="TextBox 31"/>
           <p:cNvSpPr txBox="1"/>
           <p:nvPr/>
         </p:nvSpPr>
